--- a/build/session-05/session-05-slides.pptx
+++ b/build/session-05/session-05-slides.pptx
@@ -1018,7 +1018,7 @@
           <a:p>
             <a:r>
               <a:rPr lang="en-US" dirty="0"/>
-              <a:t>Close by asking students to name one situation in which they would choose a counterexample rather than a proof. Remind them that the homework mark is for reasoning as well as the final answer.</a:t>
+              <a:t>Close by asking students to name one situation in which they would choose a counterexample rather than a proof. Remind them the problem set is practice, not assessment — but the reasoning is the whole point of doing it.</a:t>
             </a:r>
           </a:p>
         </p:txBody>
